--- a/docs/GlycoTwin_Summit_Presentation.pptx
+++ b/docs/GlycoTwin_Summit_Presentation.pptx
@@ -8961,7 +8961,7 @@
                 </a:solidFill>
                 <a:latin typeface="Calibri"/>
               </a:rPr>
-              <a:t>  200 × 7 days × 15 min</a:t>
+              <a:t>  200 × 664 labelled windows (7 days of 15 min data)</a:t>
             </a:r>
           </a:p>
           <a:p>
